--- a/public/fun/pack/pptx/talkpro/발표템플릿프리미엄_04_모임·동호회소개_화이트골드.pptx
+++ b/public/fun/pack/pptx/talkpro/발표템플릿프리미엄_04_모임·동호회소개_화이트골드.pptx
@@ -115,12 +115,12 @@
   <p:extLst>
     <p:ext uri="{521415D9-36F7-43E2-AB2F-B90AF26B5E84}">
       <p14:sectionLst xmlns:p14="http://schemas.microsoft.com/office/powerpoint/2010/main">
-        <p14:section name="시작" id="{5A73A2BA-F033-455C-8523-63B50A726AE7}">
+        <p14:section name="시작" id="{178361A4-941E-4F79-B68F-35438A0365A8}">
           <p14:sldIdLst>
             <p14:sldId id="256"/>
           </p14:sldIdLst>
         </p14:section>
-        <p14:section name="본문" id="{858AF46E-2543-49BF-B371-4CB8EFFB5051}">
+        <p14:section name="본문" id="{CA7DE1B0-C0B0-4593-A8C2-E6F65B2DB181}">
           <p14:sldIdLst>
             <p14:sldId id="257"/>
             <p14:sldId id="258"/>
@@ -131,7 +131,7 @@
             <p14:sldId id="263"/>
           </p14:sldIdLst>
         </p14:section>
-        <p14:section name="마무리" id="{9218D349-53FE-40B5-9836-18A4DF948F11}">
+        <p14:section name="마무리" id="{22835EAC-69C6-41D9-923B-DE06106D4621}">
           <p14:sldIdLst>
             <p14:sldId id="264"/>
           </p14:sldIdLst>
@@ -2338,7 +2338,7 @@
             </a:lvl1pPr>
           </a:lstStyle>
           <a:p>
-            <a:fld id="{42FBF86B-676C-4F01-9278-D906606D306E}" type="slidenum">
+            <a:fld id="{5C87F144-8B9D-4199-83C7-EC953B37FA4F}" type="slidenum">
               <a:rPr lang="en-US"/>
               <a:t>‹#›</a:t>
             </a:fld>
@@ -3519,7 +3519,7 @@
             </a:lvl1pPr>
           </a:lstStyle>
           <a:p>
-            <a:fld id="{5033E92E-39A0-49E4-8855-E5C7AAFBF916}" type="slidenum">
+            <a:fld id="{B5BA6074-C2EB-4840-A778-5CD0ACB40D24}" type="slidenum">
               <a:rPr lang="en-US"/>
               <a:t>‹#›</a:t>
             </a:fld>
@@ -4275,7 +4275,7 @@
             </a:lvl1pPr>
           </a:lstStyle>
           <a:p>
-            <a:fld id="{1AB5F09B-E23E-494C-B398-B6538F1E71B7}" type="slidenum">
+            <a:fld id="{325C1601-8966-4C1C-91CB-2F6130FE6C9D}" type="slidenum">
               <a:rPr lang="en-US"/>
               <a:t>‹#›</a:t>
             </a:fld>
@@ -5258,7 +5258,7 @@
           <a:p>
             <a:r>
               <a:rPr lang="ko-KR"/>
-              <a:t>0000. 00. 00</a:t>
+              <a:t>날짜 입력</a:t>
             </a:r>
           </a:p>
         </p:txBody>
@@ -5343,7 +5343,7 @@
           <a:bodyPr/>
           <a:lstStyle/>
           <a:p>
-            <a:fld id="{9CD861FA-E093-444E-9B5A-B97CBE87A30A}" type="slidenum">
+            <a:fld id="{611E2DB5-A821-49BB-896F-3E261529218A}" type="slidenum">
               <a:rPr lang="en-US"/>
               <a:t>‹#›</a:t>
             </a:fld>
@@ -6445,7 +6445,7 @@
           <a:bodyPr/>
           <a:lstStyle/>
           <a:p>
-            <a:fld id="{33C84F1E-55BE-413B-B2F7-8C8EA71BF33B}" type="slidenum">
+            <a:fld id="{5E0A3001-8235-4ECB-BBFA-92E2E6C39375}" type="slidenum">
               <a:rPr lang="en-US"/>
               <a:t>‹#›</a:t>
             </a:fld>
@@ -6533,7 +6533,7 @@
           <a:bodyPr/>
           <a:lstStyle/>
           <a:p>
-            <a:fld id="{9C26EAC4-CDEB-48C6-84A6-D9D9AC0A92B7}" type="slidenum">
+            <a:fld id="{6A3D5BB1-A533-48FD-BBCD-97CEB01C78FF}" type="slidenum">
               <a:rPr lang="en-US"/>
               <a:t>‹#›</a:t>
             </a:fld>
@@ -7431,7 +7431,7 @@
           <a:bodyPr/>
           <a:lstStyle/>
           <a:p>
-            <a:fld id="{C5918530-E813-44DE-B276-D44DA60E7A63}" type="slidenum">
+            <a:fld id="{296F5399-8694-4CE7-A51E-6FE79870DC60}" type="slidenum">
               <a:rPr lang="en-US"/>
               <a:t>‹#›</a:t>
             </a:fld>
@@ -8029,7 +8029,7 @@
           <a:bodyPr/>
           <a:lstStyle/>
           <a:p>
-            <a:fld id="{ACC5F990-B1AA-4D8C-AAE8-72397CBFBF41}" type="slidenum">
+            <a:fld id="{FE4D37F2-2058-490D-A8D4-7E8AAFECD470}" type="slidenum">
               <a:rPr lang="en-US"/>
               <a:t>‹#›</a:t>
             </a:fld>
@@ -8212,7 +8212,7 @@
           <a:bodyPr/>
           <a:lstStyle/>
           <a:p>
-            <a:fld id="{36785E82-1B5E-4DA5-83EF-A39D9FE2C0AB}" type="slidenum">
+            <a:fld id="{A363F34D-A70F-4263-81C7-4CFC5872CD89}" type="slidenum">
               <a:rPr lang="en-US"/>
               <a:t>‹#›</a:t>
             </a:fld>
@@ -9276,7 +9276,7 @@
           <a:bodyPr/>
           <a:lstStyle/>
           <a:p>
-            <a:fld id="{DCEB1705-93F4-41A8-870B-EEDBB6542E79}" type="slidenum">
+            <a:fld id="{09DC4971-DD9F-4E47-8D5A-460B579D63F1}" type="slidenum">
               <a:rPr lang="en-US"/>
               <a:t>‹#›</a:t>
             </a:fld>
